--- a/projekt ppt.pptx
+++ b/projekt ppt.pptx
@@ -8,6 +8,7 @@
     <p:sldId id="256" r:id="rId2"/>
     <p:sldId id="257" r:id="rId3"/>
     <p:sldId id="258" r:id="rId4"/>
+    <p:sldId id="259" r:id="rId5"/>
   </p:sldIdLst>
   <p:sldSz cx="12192000" cy="6858000"/>
   <p:notesSz cx="6858000" cy="9144000"/>
@@ -15970,8 +15971,8 @@
         </p:nvSpPr>
         <p:spPr>
           <a:xfrm>
-            <a:off x="1910179" y="2636669"/>
-            <a:ext cx="8371642" cy="1815882"/>
+            <a:off x="1724487" y="2636669"/>
+            <a:ext cx="8743025" cy="1815882"/>
           </a:xfrm>
           <a:prstGeom prst="rect">
             <a:avLst/>
@@ -15990,7 +15991,7 @@
                   <a:schemeClr val="bg1"/>
                 </a:solidFill>
               </a:rPr>
-              <a:t>A szoftverfejlesztésnek a múltja jelenje és jövője rengetek nyelven múlott és múlik jelenleg is. Ezekből a nyelvekből 3-at szedtünk össze. Az egyik a pascal a másik a c# és a harmadik a </a:t>
+              <a:t>A szoftverfejlesztésnek a múltja jelenje és jövője rengetek nyelven múlott és múlik jelenleg is. Ezekből a nyelvekből 3-at szedtünk össze. Az egyik nyelv a pascal a másik c# és a harmadik a </a:t>
             </a:r>
             <a:r>
               <a:rPr lang="hu-HU" sz="2800" dirty="0" err="1">
@@ -16157,82 +16158,90 @@
           </a:p>
         </p:txBody>
       </p:sp>
-      <p:pic>
-        <p:nvPicPr>
-          <p:cNvPr id="5" name="Kép 4">
-            <a:extLst>
-              <a:ext uri="{FF2B5EF4-FFF2-40B4-BE49-F238E27FC236}">
-                <a16:creationId xmlns:a16="http://schemas.microsoft.com/office/drawing/2014/main" id="{DBFBFAB9-9C13-4B50-B3EF-455FB085606C}"/>
-              </a:ext>
-            </a:extLst>
-          </p:cNvPr>
-          <p:cNvPicPr>
-            <a:picLocks noChangeAspect="1"/>
-          </p:cNvPicPr>
-          <p:nvPr/>
-        </p:nvPicPr>
-        <p:blipFill>
-          <a:blip r:embed="rId2">
-            <a:extLst>
-              <a:ext uri="{28A0092B-C50C-407E-A947-70E740481C1C}">
-                <a14:useLocalDpi xmlns:a14="http://schemas.microsoft.com/office/drawing/2010/main" val="0"/>
-              </a:ext>
-            </a:extLst>
-          </a:blip>
-          <a:stretch>
-            <a:fillRect/>
-          </a:stretch>
-        </p:blipFill>
-        <p:spPr>
-          <a:xfrm>
-            <a:off x="5630618" y="601181"/>
-            <a:ext cx="4756731" cy="2676617"/>
-          </a:xfrm>
-          <a:prstGeom prst="rect">
-            <a:avLst/>
-          </a:prstGeom>
-        </p:spPr>
-      </p:pic>
-      <p:pic>
-        <p:nvPicPr>
-          <p:cNvPr id="7" name="Kép 6">
-            <a:extLst>
-              <a:ext uri="{FF2B5EF4-FFF2-40B4-BE49-F238E27FC236}">
-                <a16:creationId xmlns:a16="http://schemas.microsoft.com/office/drawing/2014/main" id="{21DB9F52-BC23-4B6A-B92E-929171437A20}"/>
-              </a:ext>
-            </a:extLst>
-          </p:cNvPr>
-          <p:cNvPicPr>
-            <a:picLocks noChangeAspect="1"/>
-          </p:cNvPicPr>
-          <p:nvPr/>
-        </p:nvPicPr>
-        <p:blipFill>
-          <a:blip r:embed="rId3">
-            <a:extLst>
-              <a:ext uri="{28A0092B-C50C-407E-A947-70E740481C1C}">
-                <a14:useLocalDpi xmlns:a14="http://schemas.microsoft.com/office/drawing/2010/main" val="0"/>
-              </a:ext>
-            </a:extLst>
-          </a:blip>
-          <a:stretch>
-            <a:fillRect/>
-          </a:stretch>
-        </p:blipFill>
-        <p:spPr>
-          <a:xfrm>
-            <a:off x="5630618" y="3580203"/>
-            <a:ext cx="4772772" cy="2676616"/>
-          </a:xfrm>
-          <a:prstGeom prst="rect">
-            <a:avLst/>
-          </a:prstGeom>
-        </p:spPr>
-      </p:pic>
     </p:spTree>
     <p:extLst>
       <p:ext uri="{BB962C8B-B14F-4D97-AF65-F5344CB8AC3E}">
         <p14:creationId xmlns:p14="http://schemas.microsoft.com/office/powerpoint/2010/main" val="2263108523"/>
+      </p:ext>
+    </p:extLst>
+  </p:cSld>
+  <p:clrMapOvr>
+    <a:masterClrMapping/>
+  </p:clrMapOvr>
+</p:sld>
+</file>
+
+<file path=ppt/slides/slide4.xml><?xml version="1.0" encoding="utf-8"?>
+<p:sld xmlns:a="http://schemas.openxmlformats.org/drawingml/2006/main" xmlns:r="http://schemas.openxmlformats.org/officeDocument/2006/relationships" xmlns:p="http://schemas.openxmlformats.org/presentationml/2006/main">
+  <p:cSld>
+    <p:spTree>
+      <p:nvGrpSpPr>
+        <p:cNvPr id="1" name=""/>
+        <p:cNvGrpSpPr/>
+        <p:nvPr/>
+      </p:nvGrpSpPr>
+      <p:grpSpPr>
+        <a:xfrm>
+          <a:off x="0" y="0"/>
+          <a:ext cx="0" cy="0"/>
+          <a:chOff x="0" y="0"/>
+          <a:chExt cx="0" cy="0"/>
+        </a:xfrm>
+      </p:grpSpPr>
+      <p:sp>
+        <p:nvSpPr>
+          <p:cNvPr id="2" name="Cím 1">
+            <a:extLst>
+              <a:ext uri="{FF2B5EF4-FFF2-40B4-BE49-F238E27FC236}">
+                <a16:creationId xmlns:a16="http://schemas.microsoft.com/office/drawing/2014/main" id="{127E0938-14F8-4B7D-9BE1-1B1EC0B416BF}"/>
+              </a:ext>
+            </a:extLst>
+          </p:cNvPr>
+          <p:cNvSpPr>
+            <a:spLocks noGrp="1"/>
+          </p:cNvSpPr>
+          <p:nvPr>
+            <p:ph type="ctrTitle"/>
+          </p:nvPr>
+        </p:nvSpPr>
+        <p:spPr/>
+        <p:txBody>
+          <a:bodyPr/>
+          <a:lstStyle/>
+          <a:p>
+            <a:endParaRPr lang="hu-HU"/>
+          </a:p>
+        </p:txBody>
+      </p:sp>
+      <p:sp>
+        <p:nvSpPr>
+          <p:cNvPr id="3" name="Alcím 2">
+            <a:extLst>
+              <a:ext uri="{FF2B5EF4-FFF2-40B4-BE49-F238E27FC236}">
+                <a16:creationId xmlns:a16="http://schemas.microsoft.com/office/drawing/2014/main" id="{FCFDB029-9FB1-4E8D-84CC-25100C14E4E8}"/>
+              </a:ext>
+            </a:extLst>
+          </p:cNvPr>
+          <p:cNvSpPr>
+            <a:spLocks noGrp="1"/>
+          </p:cNvSpPr>
+          <p:nvPr>
+            <p:ph type="subTitle" idx="1"/>
+          </p:nvPr>
+        </p:nvSpPr>
+        <p:spPr/>
+        <p:txBody>
+          <a:bodyPr/>
+          <a:lstStyle/>
+          <a:p>
+            <a:endParaRPr lang="hu-HU"/>
+          </a:p>
+        </p:txBody>
+      </p:sp>
+    </p:spTree>
+    <p:extLst>
+      <p:ext uri="{BB962C8B-B14F-4D97-AF65-F5344CB8AC3E}">
+        <p14:creationId xmlns:p14="http://schemas.microsoft.com/office/powerpoint/2010/main" val="4247985688"/>
       </p:ext>
     </p:extLst>
   </p:cSld>

--- a/projekt ppt.pptx
+++ b/projekt ppt.pptx
@@ -16206,35 +16206,54 @@
         </p:nvSpPr>
         <p:spPr/>
         <p:txBody>
-          <a:bodyPr/>
+          <a:bodyPr>
+            <a:normAutofit/>
+          </a:bodyPr>
           <a:lstStyle/>
           <a:p>
-            <a:endParaRPr lang="hu-HU"/>
+            <a:r>
+              <a:rPr lang="hu-HU" sz="4000" dirty="0"/>
+              <a:t>A pascalt</a:t>
+            </a:r>
           </a:p>
         </p:txBody>
       </p:sp>
       <p:sp>
         <p:nvSpPr>
-          <p:cNvPr id="3" name="Alcím 2">
+          <p:cNvPr id="4" name="Szövegdoboz 3">
             <a:extLst>
               <a:ext uri="{FF2B5EF4-FFF2-40B4-BE49-F238E27FC236}">
-                <a16:creationId xmlns:a16="http://schemas.microsoft.com/office/drawing/2014/main" id="{FCFDB029-9FB1-4E8D-84CC-25100C14E4E8}"/>
+                <a16:creationId xmlns:a16="http://schemas.microsoft.com/office/drawing/2014/main" id="{CBA49E54-39DF-4397-865F-F942384A9740}"/>
               </a:ext>
             </a:extLst>
           </p:cNvPr>
-          <p:cNvSpPr>
-            <a:spLocks noGrp="1"/>
-          </p:cNvSpPr>
-          <p:nvPr>
-            <p:ph type="subTitle" idx="1"/>
-          </p:nvPr>
+          <p:cNvSpPr txBox="1"/>
+          <p:nvPr/>
         </p:nvSpPr>
-        <p:spPr/>
+        <p:spPr>
+          <a:xfrm>
+            <a:off x="5224015" y="1189608"/>
+            <a:ext cx="1691690" cy="707886"/>
+          </a:xfrm>
+          <a:prstGeom prst="rect">
+            <a:avLst/>
+          </a:prstGeom>
+          <a:noFill/>
+        </p:spPr>
         <p:txBody>
-          <a:bodyPr/>
+          <a:bodyPr wrap="square" rtlCol="0">
+            <a:spAutoFit/>
+          </a:bodyPr>
           <a:lstStyle/>
           <a:p>
-            <a:endParaRPr lang="hu-HU"/>
+            <a:r>
+              <a:rPr lang="hu-HU" sz="4000" dirty="0">
+                <a:solidFill>
+                  <a:schemeClr val="bg1"/>
+                </a:solidFill>
+              </a:rPr>
+              <a:t>Pascal</a:t>
+            </a:r>
           </a:p>
         </p:txBody>
       </p:sp>

--- a/projekt ppt.pptx
+++ b/projekt ppt.pptx
@@ -9,6 +9,10 @@
     <p:sldId id="257" r:id="rId3"/>
     <p:sldId id="258" r:id="rId4"/>
     <p:sldId id="259" r:id="rId5"/>
+    <p:sldId id="262" r:id="rId6"/>
+    <p:sldId id="263" r:id="rId7"/>
+    <p:sldId id="261" r:id="rId8"/>
+    <p:sldId id="264" r:id="rId9"/>
   </p:sldIdLst>
   <p:sldSz cx="12192000" cy="6858000"/>
   <p:notesSz cx="6858000" cy="9144000"/>
@@ -107,6 +111,11 @@
       </a:defRPr>
     </a:lvl9pPr>
   </p:defaultTextStyle>
+  <p:extLst>
+    <p:ext uri="{EFAFB233-063F-42B5-8137-9DF3F51BA10A}">
+      <p15:sldGuideLst xmlns:p15="http://schemas.microsoft.com/office/powerpoint/2012/main"/>
+    </p:ext>
+  </p:extLst>
 </p:presentation>
 </file>
 
@@ -1519,7 +1528,7 @@
           <a:p>
             <a:fld id="{4179E385-5384-41F8-B328-4962EF60A720}" type="datetimeFigureOut">
               <a:rPr lang="hu-HU" smtClean="0"/>
-              <a:t>2026.10.19.</a:t>
+              <a:t>2026.10.22.</a:t>
             </a:fld>
             <a:endParaRPr lang="hu-HU"/>
           </a:p>
@@ -2978,7 +2987,7 @@
           <a:p>
             <a:fld id="{4179E385-5384-41F8-B328-4962EF60A720}" type="datetimeFigureOut">
               <a:rPr lang="hu-HU" smtClean="0"/>
-              <a:t>2026.10.19.</a:t>
+              <a:t>2026.10.22.</a:t>
             </a:fld>
             <a:endParaRPr lang="hu-HU"/>
           </a:p>
@@ -4431,7 +4440,7 @@
           <a:p>
             <a:fld id="{4179E385-5384-41F8-B328-4962EF60A720}" type="datetimeFigureOut">
               <a:rPr lang="hu-HU" smtClean="0"/>
-              <a:t>2026.10.19.</a:t>
+              <a:t>2026.10.22.</a:t>
             </a:fld>
             <a:endParaRPr lang="hu-HU"/>
           </a:p>
@@ -5886,7 +5895,7 @@
           <a:p>
             <a:fld id="{4179E385-5384-41F8-B328-4962EF60A720}" type="datetimeFigureOut">
               <a:rPr lang="hu-HU" smtClean="0"/>
-              <a:t>2026.10.19.</a:t>
+              <a:t>2026.10.22.</a:t>
             </a:fld>
             <a:endParaRPr lang="hu-HU"/>
           </a:p>
@@ -7394,7 +7403,7 @@
           <a:p>
             <a:fld id="{4179E385-5384-41F8-B328-4962EF60A720}" type="datetimeFigureOut">
               <a:rPr lang="hu-HU" smtClean="0"/>
-              <a:t>2026.10.19.</a:t>
+              <a:t>2026.10.22.</a:t>
             </a:fld>
             <a:endParaRPr lang="hu-HU"/>
           </a:p>
@@ -8915,7 +8924,7 @@
           <a:p>
             <a:fld id="{4179E385-5384-41F8-B328-4962EF60A720}" type="datetimeFigureOut">
               <a:rPr lang="hu-HU" smtClean="0"/>
-              <a:t>2026.10.19.</a:t>
+              <a:t>2026.10.22.</a:t>
             </a:fld>
             <a:endParaRPr lang="hu-HU"/>
           </a:p>
@@ -10580,7 +10589,7 @@
           <a:p>
             <a:fld id="{4179E385-5384-41F8-B328-4962EF60A720}" type="datetimeFigureOut">
               <a:rPr lang="hu-HU" smtClean="0"/>
-              <a:t>2026.10.19.</a:t>
+              <a:t>2026.10.22.</a:t>
             </a:fld>
             <a:endParaRPr lang="hu-HU"/>
           </a:p>
@@ -11978,7 +11987,7 @@
           <a:p>
             <a:fld id="{4179E385-5384-41F8-B328-4962EF60A720}" type="datetimeFigureOut">
               <a:rPr lang="hu-HU" smtClean="0"/>
-              <a:t>2026.10.19.</a:t>
+              <a:t>2026.10.22.</a:t>
             </a:fld>
             <a:endParaRPr lang="hu-HU"/>
           </a:p>
@@ -12078,7 +12087,7 @@
           <a:p>
             <a:fld id="{4179E385-5384-41F8-B328-4962EF60A720}" type="datetimeFigureOut">
               <a:rPr lang="hu-HU" smtClean="0"/>
-              <a:t>2026.10.19.</a:t>
+              <a:t>2026.10.22.</a:t>
             </a:fld>
             <a:endParaRPr lang="hu-HU"/>
           </a:p>
@@ -13604,7 +13613,7 @@
           <a:p>
             <a:fld id="{4179E385-5384-41F8-B328-4962EF60A720}" type="datetimeFigureOut">
               <a:rPr lang="hu-HU" smtClean="0"/>
-              <a:t>2026.10.19.</a:t>
+              <a:t>2026.10.22.</a:t>
             </a:fld>
             <a:endParaRPr lang="hu-HU"/>
           </a:p>
@@ -15140,7 +15149,7 @@
           <a:p>
             <a:fld id="{4179E385-5384-41F8-B328-4962EF60A720}" type="datetimeFigureOut">
               <a:rPr lang="hu-HU" smtClean="0"/>
-              <a:t>2026.10.19.</a:t>
+              <a:t>2026.10.22.</a:t>
             </a:fld>
             <a:endParaRPr lang="hu-HU"/>
           </a:p>
@@ -15363,7 +15372,7 @@
           <a:p>
             <a:fld id="{4179E385-5384-41F8-B328-4962EF60A720}" type="datetimeFigureOut">
               <a:rPr lang="hu-HU" smtClean="0"/>
-              <a:t>2026.10.19.</a:t>
+              <a:t>2026.10.22.</a:t>
             </a:fld>
             <a:endParaRPr lang="hu-HU"/>
           </a:p>
@@ -15871,19 +15880,23 @@
               <a:rPr lang="hu-HU" dirty="0" err="1"/>
               <a:t>Rokkó</a:t>
             </a:r>
-            <a:br>
-              <a:rPr lang="hu-HU" dirty="0"/>
-            </a:br>
             <a:r>
               <a:rPr lang="hu-HU" dirty="0"/>
-              <a:t>	         (Megyeri Richárd) és</a:t>
+              <a:t>, </a:t>
             </a:r>
             <a:br>
               <a:rPr lang="hu-HU" dirty="0"/>
             </a:br>
             <a:r>
               <a:rPr lang="hu-HU" dirty="0"/>
-              <a:t>             László Bence</a:t>
+              <a:t>	   László Bence, és</a:t>
+            </a:r>
+            <a:br>
+              <a:rPr lang="hu-HU" dirty="0"/>
+            </a:br>
+            <a:r>
+              <a:rPr lang="hu-HU" dirty="0"/>
+              <a:t>              	     (Megyeri Richárd) </a:t>
             </a:r>
           </a:p>
         </p:txBody>
@@ -16158,6 +16171,106 @@
           </a:p>
         </p:txBody>
       </p:sp>
+      <p:pic>
+        <p:nvPicPr>
+          <p:cNvPr id="5" name="Kép 4">
+            <a:extLst>
+              <a:ext uri="{FF2B5EF4-FFF2-40B4-BE49-F238E27FC236}">
+                <a16:creationId xmlns:a16="http://schemas.microsoft.com/office/drawing/2014/main" id="{5CFEE7B7-E870-41AB-B439-321C857B28CF}"/>
+              </a:ext>
+            </a:extLst>
+          </p:cNvPr>
+          <p:cNvPicPr>
+            <a:picLocks noChangeAspect="1"/>
+          </p:cNvPicPr>
+          <p:nvPr/>
+        </p:nvPicPr>
+        <p:blipFill>
+          <a:blip r:embed="rId2">
+            <a:extLst>
+              <a:ext uri="{28A0092B-C50C-407E-A947-70E740481C1C}">
+                <a14:useLocalDpi xmlns:a14="http://schemas.microsoft.com/office/drawing/2010/main" val="0"/>
+              </a:ext>
+            </a:extLst>
+          </a:blip>
+          <a:stretch>
+            <a:fillRect/>
+          </a:stretch>
+        </p:blipFill>
+        <p:spPr>
+          <a:xfrm>
+            <a:off x="5781541" y="312231"/>
+            <a:ext cx="4853908" cy="2731298"/>
+          </a:xfrm>
+          <a:prstGeom prst="rect">
+            <a:avLst/>
+          </a:prstGeom>
+          <a:ln w="38100" cap="sq">
+            <a:solidFill>
+              <a:srgbClr val="000000"/>
+            </a:solidFill>
+            <a:prstDash val="solid"/>
+            <a:miter lim="800000"/>
+          </a:ln>
+          <a:effectLst>
+            <a:outerShdw blurRad="50800" dist="38100" dir="2700000" algn="tl" rotWithShape="0">
+              <a:srgbClr val="000000">
+                <a:alpha val="43000"/>
+              </a:srgbClr>
+            </a:outerShdw>
+          </a:effectLst>
+        </p:spPr>
+      </p:pic>
+      <p:pic>
+        <p:nvPicPr>
+          <p:cNvPr id="7" name="Kép 6">
+            <a:extLst>
+              <a:ext uri="{FF2B5EF4-FFF2-40B4-BE49-F238E27FC236}">
+                <a16:creationId xmlns:a16="http://schemas.microsoft.com/office/drawing/2014/main" id="{DEE8719A-5526-46A7-B792-317AEDF7CD44}"/>
+              </a:ext>
+            </a:extLst>
+          </p:cNvPr>
+          <p:cNvPicPr>
+            <a:picLocks noChangeAspect="1"/>
+          </p:cNvPicPr>
+          <p:nvPr/>
+        </p:nvPicPr>
+        <p:blipFill>
+          <a:blip r:embed="rId3">
+            <a:extLst>
+              <a:ext uri="{28A0092B-C50C-407E-A947-70E740481C1C}">
+                <a14:useLocalDpi xmlns:a14="http://schemas.microsoft.com/office/drawing/2010/main" val="0"/>
+              </a:ext>
+            </a:extLst>
+          </a:blip>
+          <a:stretch>
+            <a:fillRect/>
+          </a:stretch>
+        </p:blipFill>
+        <p:spPr>
+          <a:xfrm>
+            <a:off x="5781541" y="3501579"/>
+            <a:ext cx="4853908" cy="2739915"/>
+          </a:xfrm>
+          <a:prstGeom prst="rect">
+            <a:avLst/>
+          </a:prstGeom>
+          <a:ln w="38100" cap="sq">
+            <a:solidFill>
+              <a:srgbClr val="000000"/>
+            </a:solidFill>
+            <a:prstDash val="solid"/>
+            <a:miter lim="800000"/>
+          </a:ln>
+          <a:effectLst>
+            <a:outerShdw blurRad="50800" dist="38100" dir="2700000" algn="tl" rotWithShape="0">
+              <a:srgbClr val="000000">
+                <a:alpha val="43000"/>
+              </a:srgbClr>
+            </a:outerShdw>
+          </a:effectLst>
+        </p:spPr>
+      </p:pic>
     </p:spTree>
     <p:extLst>
       <p:ext uri="{BB962C8B-B14F-4D97-AF65-F5344CB8AC3E}">
@@ -16204,16 +16317,55 @@
             <p:ph type="ctrTitle"/>
           </p:nvPr>
         </p:nvSpPr>
-        <p:spPr/>
+        <p:spPr>
+          <a:xfrm>
+            <a:off x="1756042" y="3202900"/>
+            <a:ext cx="8679915" cy="1748729"/>
+          </a:xfrm>
+        </p:spPr>
         <p:txBody>
           <a:bodyPr>
-            <a:normAutofit/>
+            <a:normAutofit fontScale="90000"/>
           </a:bodyPr>
           <a:lstStyle/>
           <a:p>
             <a:r>
               <a:rPr lang="hu-HU" sz="4000" dirty="0"/>
-              <a:t>A pascalt</a:t>
+              <a:t>Akkortájt a programozási nyelvek mint pl. </a:t>
+            </a:r>
+            <a:r>
+              <a:rPr lang="hu-HU" sz="4000" dirty="0" err="1"/>
+              <a:t>Fortran</a:t>
+            </a:r>
+            <a:r>
+              <a:rPr lang="hu-HU" sz="4000" dirty="0"/>
+              <a:t> szekvenciális kódok voltak nehezen lehetett őket</a:t>
+            </a:r>
+            <a:br>
+              <a:rPr lang="hu-HU" sz="4000" dirty="0"/>
+            </a:br>
+            <a:r>
+              <a:rPr lang="hu-HU" sz="4000" dirty="0"/>
+              <a:t>érteni és strukturálni.</a:t>
+            </a:r>
+            <a:br>
+              <a:rPr lang="hu-HU" sz="4000" dirty="0"/>
+            </a:br>
+            <a:r>
+              <a:rPr lang="hu-HU" sz="4000" dirty="0" err="1"/>
+              <a:t>Niklaus</a:t>
+            </a:r>
+            <a:r>
+              <a:rPr lang="hu-HU" sz="4000" dirty="0"/>
+              <a:t> egy </a:t>
+            </a:r>
+            <a:r>
+              <a:rPr lang="hu-HU" sz="4000" dirty="0" err="1"/>
+              <a:t>struktúrált</a:t>
+            </a:r>
+            <a:r>
+              <a:rPr lang="hu-HU" sz="4000" dirty="0"/>
+              <a:t> könnyen érthető nyelvet akart létrehozni amit egyetemi oktatásra szánt, de a kereskedelemben is használták.</a:t>
             </a:r>
           </a:p>
         </p:txBody>
@@ -16232,8 +16384,8 @@
         </p:nvSpPr>
         <p:spPr>
           <a:xfrm>
-            <a:off x="5224015" y="1189608"/>
-            <a:ext cx="1691690" cy="707886"/>
+            <a:off x="4282982" y="1198486"/>
+            <a:ext cx="4852140" cy="707886"/>
           </a:xfrm>
           <a:prstGeom prst="rect">
             <a:avLst/>
@@ -16252,7 +16404,7 @@
                   <a:schemeClr val="bg1"/>
                 </a:solidFill>
               </a:rPr>
-              <a:t>Pascal</a:t>
+              <a:t>Miért jött létre?</a:t>
             </a:r>
           </a:p>
         </p:txBody>
@@ -16261,6 +16413,422 @@
     <p:extLst>
       <p:ext uri="{BB962C8B-B14F-4D97-AF65-F5344CB8AC3E}">
         <p14:creationId xmlns:p14="http://schemas.microsoft.com/office/powerpoint/2010/main" val="4247985688"/>
+      </p:ext>
+    </p:extLst>
+  </p:cSld>
+  <p:clrMapOvr>
+    <a:masterClrMapping/>
+  </p:clrMapOvr>
+</p:sld>
+</file>
+
+<file path=ppt/slides/slide5.xml><?xml version="1.0" encoding="utf-8"?>
+<p:sld xmlns:a="http://schemas.openxmlformats.org/drawingml/2006/main" xmlns:r="http://schemas.openxmlformats.org/officeDocument/2006/relationships" xmlns:p="http://schemas.openxmlformats.org/presentationml/2006/main">
+  <p:cSld>
+    <p:spTree>
+      <p:nvGrpSpPr>
+        <p:cNvPr id="1" name=""/>
+        <p:cNvGrpSpPr/>
+        <p:nvPr/>
+      </p:nvGrpSpPr>
+      <p:grpSpPr>
+        <a:xfrm>
+          <a:off x="0" y="0"/>
+          <a:ext cx="0" cy="0"/>
+          <a:chOff x="0" y="0"/>
+          <a:chExt cx="0" cy="0"/>
+        </a:xfrm>
+      </p:grpSpPr>
+      <p:sp>
+        <p:nvSpPr>
+          <p:cNvPr id="2" name="Cím 1">
+            <a:extLst>
+              <a:ext uri="{FF2B5EF4-FFF2-40B4-BE49-F238E27FC236}">
+                <a16:creationId xmlns:a16="http://schemas.microsoft.com/office/drawing/2014/main" id="{A5C3963A-BC53-4611-A8E4-ACAEAD6D1559}"/>
+              </a:ext>
+            </a:extLst>
+          </p:cNvPr>
+          <p:cNvSpPr>
+            <a:spLocks noGrp="1"/>
+          </p:cNvSpPr>
+          <p:nvPr>
+            <p:ph type="ctrTitle"/>
+          </p:nvPr>
+        </p:nvSpPr>
+        <p:spPr>
+          <a:xfrm>
+            <a:off x="3273629" y="1225118"/>
+            <a:ext cx="5612919" cy="681538"/>
+          </a:xfrm>
+        </p:spPr>
+        <p:txBody>
+          <a:bodyPr>
+            <a:normAutofit fontScale="90000"/>
+          </a:bodyPr>
+          <a:lstStyle/>
+          <a:p>
+            <a:r>
+              <a:rPr lang="hu-HU" dirty="0"/>
+              <a:t>Technikai jellemzői:</a:t>
+            </a:r>
+          </a:p>
+        </p:txBody>
+      </p:sp>
+      <p:pic>
+        <p:nvPicPr>
+          <p:cNvPr id="5" name="Kép 4">
+            <a:extLst>
+              <a:ext uri="{FF2B5EF4-FFF2-40B4-BE49-F238E27FC236}">
+                <a16:creationId xmlns:a16="http://schemas.microsoft.com/office/drawing/2014/main" id="{DE306553-2A0B-47CC-B145-7E389265E222}"/>
+              </a:ext>
+            </a:extLst>
+          </p:cNvPr>
+          <p:cNvPicPr>
+            <a:picLocks noChangeAspect="1"/>
+          </p:cNvPicPr>
+          <p:nvPr/>
+        </p:nvPicPr>
+        <p:blipFill>
+          <a:blip r:embed="rId2">
+            <a:extLst>
+              <a:ext uri="{28A0092B-C50C-407E-A947-70E740481C1C}">
+                <a14:useLocalDpi xmlns:a14="http://schemas.microsoft.com/office/drawing/2010/main" val="0"/>
+              </a:ext>
+            </a:extLst>
+          </a:blip>
+          <a:stretch>
+            <a:fillRect/>
+          </a:stretch>
+        </p:blipFill>
+        <p:spPr>
+          <a:xfrm>
+            <a:off x="3016648" y="2024107"/>
+            <a:ext cx="6158703" cy="3249228"/>
+          </a:xfrm>
+          <a:prstGeom prst="rect">
+            <a:avLst/>
+          </a:prstGeom>
+          <a:ln>
+            <a:noFill/>
+          </a:ln>
+          <a:effectLst>
+            <a:outerShdw blurRad="190500" algn="tl" rotWithShape="0">
+              <a:srgbClr val="000000">
+                <a:alpha val="70000"/>
+              </a:srgbClr>
+            </a:outerShdw>
+          </a:effectLst>
+        </p:spPr>
+      </p:pic>
+    </p:spTree>
+    <p:extLst>
+      <p:ext uri="{BB962C8B-B14F-4D97-AF65-F5344CB8AC3E}">
+        <p14:creationId xmlns:p14="http://schemas.microsoft.com/office/powerpoint/2010/main" val="1579178510"/>
+      </p:ext>
+    </p:extLst>
+  </p:cSld>
+  <p:clrMapOvr>
+    <a:masterClrMapping/>
+  </p:clrMapOvr>
+</p:sld>
+</file>
+
+<file path=ppt/slides/slide6.xml><?xml version="1.0" encoding="utf-8"?>
+<p:sld xmlns:a="http://schemas.openxmlformats.org/drawingml/2006/main" xmlns:r="http://schemas.openxmlformats.org/officeDocument/2006/relationships" xmlns:p="http://schemas.openxmlformats.org/presentationml/2006/main">
+  <p:cSld>
+    <p:spTree>
+      <p:nvGrpSpPr>
+        <p:cNvPr id="1" name=""/>
+        <p:cNvGrpSpPr/>
+        <p:nvPr/>
+      </p:nvGrpSpPr>
+      <p:grpSpPr>
+        <a:xfrm>
+          <a:off x="0" y="0"/>
+          <a:ext cx="0" cy="0"/>
+          <a:chOff x="0" y="0"/>
+          <a:chExt cx="0" cy="0"/>
+        </a:xfrm>
+      </p:grpSpPr>
+      <p:sp>
+        <p:nvSpPr>
+          <p:cNvPr id="2" name="Cím 1">
+            <a:extLst>
+              <a:ext uri="{FF2B5EF4-FFF2-40B4-BE49-F238E27FC236}">
+                <a16:creationId xmlns:a16="http://schemas.microsoft.com/office/drawing/2014/main" id="{3A31C341-B7DE-4D03-A54A-2311140D9258}"/>
+              </a:ext>
+            </a:extLst>
+          </p:cNvPr>
+          <p:cNvSpPr>
+            <a:spLocks noGrp="1"/>
+          </p:cNvSpPr>
+          <p:nvPr>
+            <p:ph type="title"/>
+          </p:nvPr>
+        </p:nvSpPr>
+        <p:spPr>
+          <a:xfrm>
+            <a:off x="4554391" y="1198485"/>
+            <a:ext cx="3083217" cy="639180"/>
+          </a:xfrm>
+        </p:spPr>
+        <p:txBody>
+          <a:bodyPr>
+            <a:normAutofit fontScale="90000"/>
+          </a:bodyPr>
+          <a:lstStyle/>
+          <a:p>
+            <a:r>
+              <a:rPr lang="hu-HU" sz="4400" dirty="0"/>
+              <a:t>Paradigma:</a:t>
+            </a:r>
+            <a:endParaRPr lang="hu-HU" dirty="0"/>
+          </a:p>
+        </p:txBody>
+      </p:sp>
+      <p:sp>
+        <p:nvSpPr>
+          <p:cNvPr id="3" name="Szöveg helye 2">
+            <a:extLst>
+              <a:ext uri="{FF2B5EF4-FFF2-40B4-BE49-F238E27FC236}">
+                <a16:creationId xmlns:a16="http://schemas.microsoft.com/office/drawing/2014/main" id="{A1676796-99A6-47AD-86CF-02491982C334}"/>
+              </a:ext>
+            </a:extLst>
+          </p:cNvPr>
+          <p:cNvSpPr>
+            <a:spLocks noGrp="1"/>
+          </p:cNvSpPr>
+          <p:nvPr>
+            <p:ph type="body" idx="1"/>
+          </p:nvPr>
+        </p:nvSpPr>
+        <p:spPr>
+          <a:xfrm>
+            <a:off x="3350888" y="1988597"/>
+            <a:ext cx="5490223" cy="2957925"/>
+          </a:xfrm>
+        </p:spPr>
+        <p:txBody>
+          <a:bodyPr>
+            <a:normAutofit fontScale="92500" lnSpcReduction="10000"/>
+          </a:bodyPr>
+          <a:lstStyle/>
+          <a:p>
+            <a:br>
+              <a:rPr lang="hu-HU" sz="3600" dirty="0"/>
+            </a:br>
+            <a:r>
+              <a:rPr lang="hu-HU" sz="3600" dirty="0"/>
+              <a:t>A pascal egy procedurális </a:t>
+            </a:r>
+            <a:r>
+              <a:rPr lang="hu-HU" sz="3600" dirty="0" err="1"/>
+              <a:t>struktúrált</a:t>
+            </a:r>
+            <a:r>
+              <a:rPr lang="hu-HU" sz="3600" dirty="0"/>
+              <a:t> aminek későbbi változatai támogatták az OPP megközelítést.</a:t>
+            </a:r>
+          </a:p>
+        </p:txBody>
+      </p:sp>
+    </p:spTree>
+    <p:extLst>
+      <p:ext uri="{BB962C8B-B14F-4D97-AF65-F5344CB8AC3E}">
+        <p14:creationId xmlns:p14="http://schemas.microsoft.com/office/powerpoint/2010/main" val="2316412380"/>
+      </p:ext>
+    </p:extLst>
+  </p:cSld>
+  <p:clrMapOvr>
+    <a:masterClrMapping/>
+  </p:clrMapOvr>
+</p:sld>
+</file>
+
+<file path=ppt/slides/slide7.xml><?xml version="1.0" encoding="utf-8"?>
+<p:sld xmlns:a="http://schemas.openxmlformats.org/drawingml/2006/main" xmlns:r="http://schemas.openxmlformats.org/officeDocument/2006/relationships" xmlns:p="http://schemas.openxmlformats.org/presentationml/2006/main">
+  <p:cSld>
+    <p:spTree>
+      <p:nvGrpSpPr>
+        <p:cNvPr id="1" name=""/>
+        <p:cNvGrpSpPr/>
+        <p:nvPr/>
+      </p:nvGrpSpPr>
+      <p:grpSpPr>
+        <a:xfrm>
+          <a:off x="0" y="0"/>
+          <a:ext cx="0" cy="0"/>
+          <a:chOff x="0" y="0"/>
+          <a:chExt cx="0" cy="0"/>
+        </a:xfrm>
+      </p:grpSpPr>
+      <p:sp>
+        <p:nvSpPr>
+          <p:cNvPr id="2" name="Cím 1">
+            <a:extLst>
+              <a:ext uri="{FF2B5EF4-FFF2-40B4-BE49-F238E27FC236}">
+                <a16:creationId xmlns:a16="http://schemas.microsoft.com/office/drawing/2014/main" id="{7CA7C058-A0DA-4F73-8855-D349BC0414E9}"/>
+              </a:ext>
+            </a:extLst>
+          </p:cNvPr>
+          <p:cNvSpPr>
+            <a:spLocks noGrp="1"/>
+          </p:cNvSpPr>
+          <p:nvPr>
+            <p:ph type="title"/>
+          </p:nvPr>
+        </p:nvSpPr>
+        <p:spPr>
+          <a:xfrm>
+            <a:off x="4652046" y="1189606"/>
+            <a:ext cx="2887908" cy="674691"/>
+          </a:xfrm>
+        </p:spPr>
+        <p:txBody>
+          <a:bodyPr>
+            <a:normAutofit fontScale="90000"/>
+          </a:bodyPr>
+          <a:lstStyle/>
+          <a:p>
+            <a:r>
+              <a:rPr lang="hu-HU" dirty="0"/>
+              <a:t>Típusosság:</a:t>
+            </a:r>
+          </a:p>
+        </p:txBody>
+      </p:sp>
+      <p:sp>
+        <p:nvSpPr>
+          <p:cNvPr id="3" name="Szöveg helye 2">
+            <a:extLst>
+              <a:ext uri="{FF2B5EF4-FFF2-40B4-BE49-F238E27FC236}">
+                <a16:creationId xmlns:a16="http://schemas.microsoft.com/office/drawing/2014/main" id="{37BD7E6D-DED4-4992-B62E-A1A8B561880D}"/>
+              </a:ext>
+            </a:extLst>
+          </p:cNvPr>
+          <p:cNvSpPr>
+            <a:spLocks noGrp="1"/>
+          </p:cNvSpPr>
+          <p:nvPr>
+            <p:ph type="body" idx="1"/>
+          </p:nvPr>
+        </p:nvSpPr>
+        <p:spPr>
+          <a:xfrm>
+            <a:off x="3344215" y="2086252"/>
+            <a:ext cx="5490223" cy="3144369"/>
+          </a:xfrm>
+        </p:spPr>
+        <p:txBody>
+          <a:bodyPr>
+            <a:normAutofit/>
+          </a:bodyPr>
+          <a:lstStyle/>
+          <a:p>
+            <a:r>
+              <a:rPr lang="hu-HU" sz="3200" dirty="0"/>
+              <a:t>Statikus a változóknak a típusát időben megkell adni. Emellett erős nincs típuskonverzió a nem kompatibilis típusok között.</a:t>
+            </a:r>
+          </a:p>
+          <a:p>
+            <a:endParaRPr lang="hu-HU" sz="3200" dirty="0"/>
+          </a:p>
+        </p:txBody>
+      </p:sp>
+    </p:spTree>
+    <p:extLst>
+      <p:ext uri="{BB962C8B-B14F-4D97-AF65-F5344CB8AC3E}">
+        <p14:creationId xmlns:p14="http://schemas.microsoft.com/office/powerpoint/2010/main" val="1326091721"/>
+      </p:ext>
+    </p:extLst>
+  </p:cSld>
+  <p:clrMapOvr>
+    <a:masterClrMapping/>
+  </p:clrMapOvr>
+</p:sld>
+</file>
+
+<file path=ppt/slides/slide8.xml><?xml version="1.0" encoding="utf-8"?>
+<p:sld xmlns:a="http://schemas.openxmlformats.org/drawingml/2006/main" xmlns:r="http://schemas.openxmlformats.org/officeDocument/2006/relationships" xmlns:p="http://schemas.openxmlformats.org/presentationml/2006/main">
+  <p:cSld>
+    <p:spTree>
+      <p:nvGrpSpPr>
+        <p:cNvPr id="1" name=""/>
+        <p:cNvGrpSpPr/>
+        <p:nvPr/>
+      </p:nvGrpSpPr>
+      <p:grpSpPr>
+        <a:xfrm>
+          <a:off x="0" y="0"/>
+          <a:ext cx="0" cy="0"/>
+          <a:chOff x="0" y="0"/>
+          <a:chExt cx="0" cy="0"/>
+        </a:xfrm>
+      </p:grpSpPr>
+      <p:sp>
+        <p:nvSpPr>
+          <p:cNvPr id="2" name="Cím 1">
+            <a:extLst>
+              <a:ext uri="{FF2B5EF4-FFF2-40B4-BE49-F238E27FC236}">
+                <a16:creationId xmlns:a16="http://schemas.microsoft.com/office/drawing/2014/main" id="{C8B8E33B-E4FA-4D11-ADED-5A63B7D5D5E2}"/>
+              </a:ext>
+            </a:extLst>
+          </p:cNvPr>
+          <p:cNvSpPr>
+            <a:spLocks noGrp="1"/>
+          </p:cNvSpPr>
+          <p:nvPr>
+            <p:ph type="title"/>
+          </p:nvPr>
+        </p:nvSpPr>
+        <p:spPr>
+          <a:xfrm>
+            <a:off x="4141580" y="1251751"/>
+            <a:ext cx="3908840" cy="656934"/>
+          </a:xfrm>
+        </p:spPr>
+        <p:txBody>
+          <a:bodyPr>
+            <a:normAutofit fontScale="90000"/>
+          </a:bodyPr>
+          <a:lstStyle/>
+          <a:p>
+            <a:r>
+              <a:rPr lang="hu-HU" dirty="0"/>
+              <a:t>Memóriakezelés:</a:t>
+            </a:r>
+          </a:p>
+        </p:txBody>
+      </p:sp>
+      <p:sp>
+        <p:nvSpPr>
+          <p:cNvPr id="3" name="Szöveg helye 2">
+            <a:extLst>
+              <a:ext uri="{FF2B5EF4-FFF2-40B4-BE49-F238E27FC236}">
+                <a16:creationId xmlns:a16="http://schemas.microsoft.com/office/drawing/2014/main" id="{75043A2C-8073-48E0-84BA-BB65C3C2A7DD}"/>
+              </a:ext>
+            </a:extLst>
+          </p:cNvPr>
+          <p:cNvSpPr>
+            <a:spLocks noGrp="1"/>
+          </p:cNvSpPr>
+          <p:nvPr>
+            <p:ph type="body" idx="1"/>
+          </p:nvPr>
+        </p:nvSpPr>
+        <p:spPr/>
+        <p:txBody>
+          <a:bodyPr/>
+          <a:lstStyle/>
+          <a:p>
+            <a:endParaRPr lang="hu-HU"/>
+          </a:p>
+        </p:txBody>
+      </p:sp>
+    </p:spTree>
+    <p:extLst>
+      <p:ext uri="{BB962C8B-B14F-4D97-AF65-F5344CB8AC3E}">
+        <p14:creationId xmlns:p14="http://schemas.microsoft.com/office/powerpoint/2010/main" val="1454976495"/>
       </p:ext>
     </p:extLst>
   </p:cSld>

--- a/projekt ppt.pptx
+++ b/projekt ppt.pptx
@@ -13,6 +13,7 @@
     <p:sldId id="263" r:id="rId7"/>
     <p:sldId id="261" r:id="rId8"/>
     <p:sldId id="264" r:id="rId9"/>
+    <p:sldId id="265" r:id="rId10"/>
   </p:sldIdLst>
   <p:sldSz cx="12192000" cy="6858000"/>
   <p:notesSz cx="6858000" cy="9144000"/>
@@ -16816,12 +16817,95 @@
             <p:ph type="body" idx="1"/>
           </p:nvPr>
         </p:nvSpPr>
-        <p:spPr/>
+        <p:spPr>
+          <a:xfrm>
+            <a:off x="3288744" y="2032986"/>
+            <a:ext cx="5490223" cy="3511119"/>
+          </a:xfrm>
+        </p:spPr>
         <p:txBody>
-          <a:bodyPr/>
+          <a:bodyPr>
+            <a:normAutofit lnSpcReduction="10000"/>
+          </a:bodyPr>
           <a:lstStyle/>
           <a:p>
-            <a:endParaRPr lang="hu-HU"/>
+            <a:r>
+              <a:rPr lang="hu-HU" sz="2400" dirty="0"/>
+              <a:t>A pascalban kétféleképpen</a:t>
+            </a:r>
+            <a:r>
+              <a:rPr lang="hu-HU" sz="2400" dirty="0">
+                <a:solidFill>
+                  <a:srgbClr val="000000"/>
+                </a:solidFill>
+                <a:latin typeface="Arial" panose="020B0604020202020204" pitchFamily="34" charset="0"/>
+              </a:rPr>
+              <a:t> </a:t>
+            </a:r>
+            <a:r>
+              <a:rPr lang="hu-HU" sz="2400" dirty="0">
+                <a:solidFill>
+                  <a:schemeClr val="bg1"/>
+                </a:solidFill>
+                <a:latin typeface="Arial" panose="020B0604020202020204" pitchFamily="34" charset="0"/>
+              </a:rPr>
+              <a:t>statikusan illetve dinamikusan lehet kezelni a memóriát a mutatókkal amik az adott változónak a </a:t>
+            </a:r>
+            <a:r>
+              <a:rPr lang="hu-HU" sz="2400" dirty="0" err="1">
+                <a:solidFill>
+                  <a:schemeClr val="bg1"/>
+                </a:solidFill>
+                <a:latin typeface="Arial" panose="020B0604020202020204" pitchFamily="34" charset="0"/>
+              </a:rPr>
+              <a:t>memóricímét</a:t>
+            </a:r>
+            <a:r>
+              <a:rPr lang="hu-HU" sz="2400" dirty="0">
+                <a:solidFill>
+                  <a:schemeClr val="bg1"/>
+                </a:solidFill>
+                <a:latin typeface="Arial" panose="020B0604020202020204" pitchFamily="34" charset="0"/>
+              </a:rPr>
+              <a:t> tartalmazzák. A pascal régebbi változataiban nincs </a:t>
+            </a:r>
+            <a:r>
+              <a:rPr lang="hu-HU" sz="2400" dirty="0" err="1">
+                <a:solidFill>
+                  <a:schemeClr val="bg1"/>
+                </a:solidFill>
+                <a:latin typeface="Arial" panose="020B0604020202020204" pitchFamily="34" charset="0"/>
+              </a:rPr>
+              <a:t>Garbage</a:t>
+            </a:r>
+            <a:r>
+              <a:rPr lang="hu-HU" sz="2400" dirty="0">
+                <a:solidFill>
+                  <a:schemeClr val="bg1"/>
+                </a:solidFill>
+                <a:latin typeface="Arial" panose="020B0604020202020204" pitchFamily="34" charset="0"/>
+              </a:rPr>
+              <a:t> </a:t>
+            </a:r>
+            <a:r>
+              <a:rPr lang="hu-HU" sz="2400" dirty="0" err="1">
+                <a:solidFill>
+                  <a:schemeClr val="bg1"/>
+                </a:solidFill>
+                <a:latin typeface="Arial" panose="020B0604020202020204" pitchFamily="34" charset="0"/>
+              </a:rPr>
+              <a:t>Collection</a:t>
+            </a:r>
+            <a:r>
+              <a:rPr lang="hu-HU" sz="2400" dirty="0">
+                <a:solidFill>
+                  <a:schemeClr val="bg1"/>
+                </a:solidFill>
+                <a:latin typeface="Arial" panose="020B0604020202020204" pitchFamily="34" charset="0"/>
+              </a:rPr>
+              <a:t> amire ha nem figyelünk memóriaszivárgás lehet a vége</a:t>
+            </a:r>
+            <a:endParaRPr lang="hu-HU" sz="2400" dirty="0"/>
           </a:p>
         </p:txBody>
       </p:sp>
@@ -16829,6 +16913,101 @@
     <p:extLst>
       <p:ext uri="{BB962C8B-B14F-4D97-AF65-F5344CB8AC3E}">
         <p14:creationId xmlns:p14="http://schemas.microsoft.com/office/powerpoint/2010/main" val="1454976495"/>
+      </p:ext>
+    </p:extLst>
+  </p:cSld>
+  <p:clrMapOvr>
+    <a:masterClrMapping/>
+  </p:clrMapOvr>
+</p:sld>
+</file>
+
+<file path=ppt/slides/slide9.xml><?xml version="1.0" encoding="utf-8"?>
+<p:sld xmlns:a="http://schemas.openxmlformats.org/drawingml/2006/main" xmlns:r="http://schemas.openxmlformats.org/officeDocument/2006/relationships" xmlns:p="http://schemas.openxmlformats.org/presentationml/2006/main">
+  <p:cSld>
+    <p:spTree>
+      <p:nvGrpSpPr>
+        <p:cNvPr id="1" name=""/>
+        <p:cNvGrpSpPr/>
+        <p:nvPr/>
+      </p:nvGrpSpPr>
+      <p:grpSpPr>
+        <a:xfrm>
+          <a:off x="0" y="0"/>
+          <a:ext cx="0" cy="0"/>
+          <a:chOff x="0" y="0"/>
+          <a:chExt cx="0" cy="0"/>
+        </a:xfrm>
+      </p:grpSpPr>
+      <p:sp>
+        <p:nvSpPr>
+          <p:cNvPr id="2" name="Cím 1">
+            <a:extLst>
+              <a:ext uri="{FF2B5EF4-FFF2-40B4-BE49-F238E27FC236}">
+                <a16:creationId xmlns:a16="http://schemas.microsoft.com/office/drawing/2014/main" id="{2B047DA5-F210-4778-9EE5-825DFCF6282F}"/>
+              </a:ext>
+            </a:extLst>
+          </p:cNvPr>
+          <p:cNvSpPr>
+            <a:spLocks noGrp="1"/>
+          </p:cNvSpPr>
+          <p:nvPr>
+            <p:ph type="title"/>
+          </p:nvPr>
+        </p:nvSpPr>
+        <p:spPr>
+          <a:xfrm>
+            <a:off x="4319133" y="1102449"/>
+            <a:ext cx="3553734" cy="752971"/>
+          </a:xfrm>
+        </p:spPr>
+        <p:txBody>
+          <a:bodyPr>
+            <a:normAutofit fontScale="90000"/>
+          </a:bodyPr>
+          <a:lstStyle/>
+          <a:p>
+            <a:r>
+              <a:rPr lang="hu-HU" dirty="0"/>
+              <a:t>Program példa</a:t>
+            </a:r>
+          </a:p>
+        </p:txBody>
+      </p:sp>
+      <p:pic>
+        <p:nvPicPr>
+          <p:cNvPr id="5" name="Kép 4">
+            <a:extLst>
+              <a:ext uri="{FF2B5EF4-FFF2-40B4-BE49-F238E27FC236}">
+                <a16:creationId xmlns:a16="http://schemas.microsoft.com/office/drawing/2014/main" id="{0CC57B0F-3577-4A4E-89A9-52DEBB33FEEF}"/>
+              </a:ext>
+            </a:extLst>
+          </p:cNvPr>
+          <p:cNvPicPr>
+            <a:picLocks noChangeAspect="1"/>
+          </p:cNvPicPr>
+          <p:nvPr/>
+        </p:nvPicPr>
+        <p:blipFill>
+          <a:blip r:embed="rId2"/>
+          <a:stretch>
+            <a:fillRect/>
+          </a:stretch>
+        </p:blipFill>
+        <p:spPr>
+          <a:xfrm>
+            <a:off x="3365973" y="2496142"/>
+            <a:ext cx="5460054" cy="1865716"/>
+          </a:xfrm>
+          <a:prstGeom prst="rect">
+            <a:avLst/>
+          </a:prstGeom>
+        </p:spPr>
+      </p:pic>
+    </p:spTree>
+    <p:extLst>
+      <p:ext uri="{BB962C8B-B14F-4D97-AF65-F5344CB8AC3E}">
+        <p14:creationId xmlns:p14="http://schemas.microsoft.com/office/powerpoint/2010/main" val="635912420"/>
       </p:ext>
     </p:extLst>
   </p:cSld>
